--- a/ParallelLSTM/result/성능개선 3 결과.pptx
+++ b/ParallelLSTM/result/성능개선 3 결과.pptx
@@ -264,7 +264,7 @@
           <a:p>
             <a:fld id="{B72759B8-7332-44BD-B1FF-13450B6DA7DC}" type="datetimeFigureOut">
               <a:rPr lang="ko-KR" altLang="en-US" smtClean="0"/>
-              <a:t>2026-01-09</a:t>
+              <a:t>2026-01-14</a:t>
             </a:fld>
             <a:endParaRPr lang="ko-KR" altLang="en-US"/>
           </a:p>
@@ -434,7 +434,7 @@
           <a:p>
             <a:fld id="{B72759B8-7332-44BD-B1FF-13450B6DA7DC}" type="datetimeFigureOut">
               <a:rPr lang="ko-KR" altLang="en-US" smtClean="0"/>
-              <a:t>2026-01-09</a:t>
+              <a:t>2026-01-14</a:t>
             </a:fld>
             <a:endParaRPr lang="ko-KR" altLang="en-US"/>
           </a:p>
@@ -614,7 +614,7 @@
           <a:p>
             <a:fld id="{B72759B8-7332-44BD-B1FF-13450B6DA7DC}" type="datetimeFigureOut">
               <a:rPr lang="ko-KR" altLang="en-US" smtClean="0"/>
-              <a:t>2026-01-09</a:t>
+              <a:t>2026-01-14</a:t>
             </a:fld>
             <a:endParaRPr lang="ko-KR" altLang="en-US"/>
           </a:p>
@@ -784,7 +784,7 @@
           <a:p>
             <a:fld id="{B72759B8-7332-44BD-B1FF-13450B6DA7DC}" type="datetimeFigureOut">
               <a:rPr lang="ko-KR" altLang="en-US" smtClean="0"/>
-              <a:t>2026-01-09</a:t>
+              <a:t>2026-01-14</a:t>
             </a:fld>
             <a:endParaRPr lang="ko-KR" altLang="en-US"/>
           </a:p>
@@ -1035,7 +1035,7 @@
           <a:p>
             <a:fld id="{B72759B8-7332-44BD-B1FF-13450B6DA7DC}" type="datetimeFigureOut">
               <a:rPr lang="ko-KR" altLang="en-US" smtClean="0"/>
-              <a:t>2026-01-09</a:t>
+              <a:t>2026-01-14</a:t>
             </a:fld>
             <a:endParaRPr lang="ko-KR" altLang="en-US"/>
           </a:p>
@@ -1267,7 +1267,7 @@
           <a:p>
             <a:fld id="{B72759B8-7332-44BD-B1FF-13450B6DA7DC}" type="datetimeFigureOut">
               <a:rPr lang="ko-KR" altLang="en-US" smtClean="0"/>
-              <a:t>2026-01-09</a:t>
+              <a:t>2026-01-14</a:t>
             </a:fld>
             <a:endParaRPr lang="ko-KR" altLang="en-US"/>
           </a:p>
@@ -1614,7 +1614,7 @@
           <a:p>
             <a:fld id="{B72759B8-7332-44BD-B1FF-13450B6DA7DC}" type="datetimeFigureOut">
               <a:rPr lang="ko-KR" altLang="en-US" smtClean="0"/>
-              <a:t>2026-01-09</a:t>
+              <a:t>2026-01-14</a:t>
             </a:fld>
             <a:endParaRPr lang="ko-KR" altLang="en-US"/>
           </a:p>
@@ -1732,7 +1732,7 @@
           <a:p>
             <a:fld id="{B72759B8-7332-44BD-B1FF-13450B6DA7DC}" type="datetimeFigureOut">
               <a:rPr lang="ko-KR" altLang="en-US" smtClean="0"/>
-              <a:t>2026-01-09</a:t>
+              <a:t>2026-01-14</a:t>
             </a:fld>
             <a:endParaRPr lang="ko-KR" altLang="en-US"/>
           </a:p>
@@ -1850,7 +1850,7 @@
           <a:p>
             <a:fld id="{B72759B8-7332-44BD-B1FF-13450B6DA7DC}" type="datetimeFigureOut">
               <a:rPr lang="ko-KR" altLang="en-US" smtClean="0"/>
-              <a:t>2026-01-09</a:t>
+              <a:t>2026-01-14</a:t>
             </a:fld>
             <a:endParaRPr lang="ko-KR" altLang="en-US"/>
           </a:p>
@@ -2134,7 +2134,7 @@
           <a:p>
             <a:fld id="{B72759B8-7332-44BD-B1FF-13450B6DA7DC}" type="datetimeFigureOut">
               <a:rPr lang="ko-KR" altLang="en-US" smtClean="0"/>
-              <a:t>2026-01-09</a:t>
+              <a:t>2026-01-14</a:t>
             </a:fld>
             <a:endParaRPr lang="ko-KR" altLang="en-US"/>
           </a:p>
@@ -2398,7 +2398,7 @@
           <a:p>
             <a:fld id="{B72759B8-7332-44BD-B1FF-13450B6DA7DC}" type="datetimeFigureOut">
               <a:rPr lang="ko-KR" altLang="en-US" smtClean="0"/>
-              <a:t>2026-01-09</a:t>
+              <a:t>2026-01-14</a:t>
             </a:fld>
             <a:endParaRPr lang="ko-KR" altLang="en-US"/>
           </a:p>
@@ -2612,7 +2612,7 @@
           <a:p>
             <a:fld id="{B72759B8-7332-44BD-B1FF-13450B6DA7DC}" type="datetimeFigureOut">
               <a:rPr lang="ko-KR" altLang="en-US" smtClean="0"/>
-              <a:t>2026-01-09</a:t>
+              <a:t>2026-01-14</a:t>
             </a:fld>
             <a:endParaRPr lang="ko-KR" altLang="en-US"/>
           </a:p>
@@ -8303,51 +8303,39 @@
             <a:r>
               <a:rPr lang="en-US" altLang="ko-KR" sz="2000" b="1" dirty="0" err="1">
                 <a:latin typeface="+mj-ea"/>
-                <a:ea typeface="+mj-ea"/>
               </a:rPr>
               <a:t>num_of_layer</a:t>
             </a:r>
             <a:r>
               <a:rPr lang="en-US" altLang="ko-KR" sz="2000" b="1" dirty="0">
                 <a:latin typeface="+mj-ea"/>
-                <a:ea typeface="+mj-ea"/>
-              </a:rPr>
-              <a:t> =18</a:t>
+              </a:rPr>
+              <a:t> =18, </a:t>
+            </a:r>
+            <a:r>
+              <a:rPr lang="en-US" altLang="ko-KR" sz="2000" b="1" dirty="0" err="1">
+                <a:latin typeface="+mj-ea"/>
+              </a:rPr>
+              <a:t>loss_function</a:t>
             </a:r>
             <a:r>
               <a:rPr lang="en-US" altLang="ko-KR" sz="2000" b="1" dirty="0">
                 <a:latin typeface="+mj-ea"/>
               </a:rPr>
-              <a:t> </a:t>
+              <a:t> = MSE, </a:t>
             </a:r>
             <a:r>
               <a:rPr lang="en-US" altLang="ko-KR" sz="2000" b="1" dirty="0" err="1">
                 <a:latin typeface="+mj-ea"/>
               </a:rPr>
-              <a:t>loss_function</a:t>
+              <a:t>learning_rate</a:t>
             </a:r>
             <a:r>
               <a:rPr lang="en-US" altLang="ko-KR" sz="2000" b="1" dirty="0">
                 <a:latin typeface="+mj-ea"/>
               </a:rPr>
-              <a:t> = MAE, </a:t>
-            </a:r>
-            <a:r>
-              <a:rPr lang="en-US" altLang="ko-KR" sz="2000" b="1" dirty="0" err="1">
-                <a:latin typeface="+mj-ea"/>
-              </a:rPr>
-              <a:t>learning_rate</a:t>
-            </a:r>
-            <a:r>
-              <a:rPr lang="en-US" altLang="ko-KR" sz="2000" b="1" dirty="0">
-                <a:latin typeface="+mj-ea"/>
-              </a:rPr>
-              <a:t> = 0.0005 </a:t>
-            </a:r>
-            <a:endParaRPr lang="en-US" altLang="ko-KR" sz="2000" b="1" dirty="0">
-              <a:latin typeface="+mj-ea"/>
-              <a:ea typeface="+mj-ea"/>
-            </a:endParaRPr>
+              <a:t> = 0.0001 </a:t>
+            </a:r>
           </a:p>
           <a:p>
             <a:r>
@@ -9359,51 +9347,39 @@
             <a:r>
               <a:rPr lang="en-US" altLang="ko-KR" sz="2000" b="1" dirty="0" err="1">
                 <a:latin typeface="+mj-ea"/>
-                <a:ea typeface="+mj-ea"/>
               </a:rPr>
               <a:t>num_of_layer</a:t>
             </a:r>
             <a:r>
               <a:rPr lang="en-US" altLang="ko-KR" sz="2000" b="1" dirty="0">
                 <a:latin typeface="+mj-ea"/>
-                <a:ea typeface="+mj-ea"/>
-              </a:rPr>
-              <a:t> =18</a:t>
+              </a:rPr>
+              <a:t> =18, </a:t>
+            </a:r>
+            <a:r>
+              <a:rPr lang="en-US" altLang="ko-KR" sz="2000" b="1" dirty="0" err="1">
+                <a:latin typeface="+mj-ea"/>
+              </a:rPr>
+              <a:t>loss_function</a:t>
             </a:r>
             <a:r>
               <a:rPr lang="en-US" altLang="ko-KR" sz="2000" b="1" dirty="0">
                 <a:latin typeface="+mj-ea"/>
               </a:rPr>
-              <a:t> </a:t>
+              <a:t> = MSE, </a:t>
             </a:r>
             <a:r>
               <a:rPr lang="en-US" altLang="ko-KR" sz="2000" b="1" dirty="0" err="1">
                 <a:latin typeface="+mj-ea"/>
               </a:rPr>
-              <a:t>loss_function</a:t>
+              <a:t>learning_rate</a:t>
             </a:r>
             <a:r>
               <a:rPr lang="en-US" altLang="ko-KR" sz="2000" b="1" dirty="0">
                 <a:latin typeface="+mj-ea"/>
               </a:rPr>
-              <a:t> = MAE, </a:t>
-            </a:r>
-            <a:r>
-              <a:rPr lang="en-US" altLang="ko-KR" sz="2000" b="1" dirty="0" err="1">
-                <a:latin typeface="+mj-ea"/>
-              </a:rPr>
-              <a:t>learning_rate</a:t>
-            </a:r>
-            <a:r>
-              <a:rPr lang="en-US" altLang="ko-KR" sz="2000" b="1" dirty="0">
-                <a:latin typeface="+mj-ea"/>
-              </a:rPr>
-              <a:t> = 0.0005 </a:t>
-            </a:r>
-            <a:endParaRPr lang="en-US" altLang="ko-KR" sz="2000" b="1" dirty="0">
-              <a:latin typeface="+mj-ea"/>
-              <a:ea typeface="+mj-ea"/>
-            </a:endParaRPr>
+              <a:t> = 0.0001 </a:t>
+            </a:r>
           </a:p>
           <a:p>
             <a:r>
